--- a/examples/ppt/charts/charts-3d.pptx
+++ b/examples/ppt/charts/charts-3d.pptx
@@ -5,14 +5,14 @@
     <p:sldMasterId xmlns:r="http://schemas.openxmlformats.org/officeDocument/2006/relationships" id="2147483648" r:id="rId1"/>
   </p:sldMasterIdLst>
   <p:sldIdLst>
-    <p:sldId id="256" r:id="Ra5a81827f7934e71"/>
-    <p:sldId id="257" r:id="Rbf6e4299fd1041bf"/>
-    <p:sldId id="258" r:id="R47cd8e4749c34211"/>
-    <p:sldId id="259" r:id="R402c31616a524a3a"/>
-    <p:sldId id="260" r:id="Rff424252352d4962"/>
-    <p:sldId id="261" r:id="R265b81c1d3c7466c"/>
-    <p:sldId id="262" r:id="Rc0bbf295cbbb4cdc"/>
-    <p:sldId id="263" r:id="R95ad42362d4e4471"/>
+    <p:sldId id="256" r:id="R04c6f6936abc4f3c"/>
+    <p:sldId id="257" r:id="R2561349af3f34966"/>
+    <p:sldId id="258" r:id="Rf8e5895dba0b476b"/>
+    <p:sldId id="259" r:id="Re4bfeede78294db3"/>
+    <p:sldId id="260" r:id="Rd3a08f8b42e44c1a"/>
+    <p:sldId id="261" r:id="R1a43bdf7dda04c32"/>
+    <p:sldId id="262" r:id="R0be6df6c0be54e81"/>
+    <p:sldId id="263" r:id="R843621af4d0f43e4"/>
   </p:sldIdLst>
   <p:sldSz cx="12192000" cy="6858000"/>
   <p:notesSz cx="6858000" cy="9144000"/>
@@ -287,7 +287,7 @@
 </file>
 
 <file path=ppt/slideMasters/slideMaster1.xml><?xml version="1.0" encoding="utf-8"?>
-<p:sldMaster xmlns:p="http://schemas.openxmlformats.org/presentationml/2006/main">
+<p:sldMaster xmlns:r="http://schemas.openxmlformats.org/officeDocument/2006/relationships" xmlns:p="http://schemas.openxmlformats.org/presentationml/2006/main">
   <p:cSld>
     <p:spTree>
       <p:nvGrpSpPr>
@@ -4923,9 +4923,11 @@
             <c:v>East</c:v>
           </c:tx>
           <c:spPr>
-            <a:solidFill xmlns:a="http://schemas.openxmlformats.org/drawingml/2006/main">
-              <a:srgbClr val="4472C4"/>
-            </a:solidFill>
+            <a:ln xmlns:a="http://schemas.openxmlformats.org/drawingml/2006/main" w="25400">
+              <a:solidFill>
+                <a:srgbClr val="4472C4"/>
+              </a:solidFill>
+            </a:ln>
           </c:spPr>
           <c:cat>
             <c:strLit>
@@ -4970,9 +4972,11 @@
             <c:v>West</c:v>
           </c:tx>
           <c:spPr>
-            <a:solidFill xmlns:a="http://schemas.openxmlformats.org/drawingml/2006/main">
-              <a:srgbClr val="ED7D31"/>
-            </a:solidFill>
+            <a:ln xmlns:a="http://schemas.openxmlformats.org/drawingml/2006/main" w="25400">
+              <a:solidFill>
+                <a:srgbClr val="ED7D31"/>
+              </a:solidFill>
+            </a:ln>
           </c:spPr>
           <c:cat>
             <c:strLit>
@@ -6053,8 +6057,8 @@
       <p:grpSpPr/>
       <p:sp>
         <p:nvSpPr>
-          <p:cNvPr id="10000" name="TextBox 1"/>
-          <p:cNvSpPr/>
+          <p:cNvPr id="100000" name="TextBox 1"/>
+          <p:cNvSpPr txBox="1"/>
           <p:nvPr/>
         </p:nvSpPr>
         <p:spPr>
@@ -6081,7 +6085,7 @@
       </p:sp>
       <p:graphicFrame>
         <p:nvGraphicFramePr>
-          <p:cNvPr id="10001" name="column3d"/>
+          <p:cNvPr id="100001" name="column3d"/>
           <p:cNvGraphicFramePr/>
           <p:nvPr/>
         </p:nvGraphicFramePr>
@@ -6091,13 +6095,13 @@
         </p:xfrm>
         <a:graphic xmlns:a="http://schemas.openxmlformats.org/drawingml/2006/main">
           <a:graphicData uri="http://schemas.openxmlformats.org/drawingml/2006/chart">
-            <c:chart xmlns:r="http://schemas.openxmlformats.org/officeDocument/2006/relationships" xmlns:c="http://schemas.openxmlformats.org/drawingml/2006/chart" r:id="R22559e93423c4855"/>
+            <c:chart xmlns:r="http://schemas.openxmlformats.org/officeDocument/2006/relationships" xmlns:c="http://schemas.openxmlformats.org/drawingml/2006/chart" r:id="Ra51259a5dd7a447d"/>
           </a:graphicData>
         </a:graphic>
       </p:graphicFrame>
       <p:graphicFrame>
         <p:nvGraphicFramePr>
-          <p:cNvPr id="10002" name="bar3d"/>
+          <p:cNvPr id="100002" name="bar3d"/>
           <p:cNvGraphicFramePr/>
           <p:nvPr/>
         </p:nvGraphicFramePr>
@@ -6107,13 +6111,13 @@
         </p:xfrm>
         <a:graphic xmlns:a="http://schemas.openxmlformats.org/drawingml/2006/main">
           <a:graphicData uri="http://schemas.openxmlformats.org/drawingml/2006/chart">
-            <c:chart xmlns:r="http://schemas.openxmlformats.org/officeDocument/2006/relationships" xmlns:c="http://schemas.openxmlformats.org/drawingml/2006/chart" r:id="Rf9539211240240f3"/>
+            <c:chart xmlns:r="http://schemas.openxmlformats.org/officeDocument/2006/relationships" xmlns:c="http://schemas.openxmlformats.org/drawingml/2006/chart" r:id="Rdc74734700844083"/>
           </a:graphicData>
         </a:graphic>
       </p:graphicFrame>
       <p:graphicFrame>
         <p:nvGraphicFramePr>
-          <p:cNvPr id="10003" name="pie3d"/>
+          <p:cNvPr id="100003" name="pie3d"/>
           <p:cNvGraphicFramePr/>
           <p:nvPr/>
         </p:nvGraphicFramePr>
@@ -6123,13 +6127,13 @@
         </p:xfrm>
         <a:graphic xmlns:a="http://schemas.openxmlformats.org/drawingml/2006/main">
           <a:graphicData uri="http://schemas.openxmlformats.org/drawingml/2006/chart">
-            <c:chart xmlns:r="http://schemas.openxmlformats.org/officeDocument/2006/relationships" xmlns:c="http://schemas.openxmlformats.org/drawingml/2006/chart" r:id="R892e842557eb4b2e"/>
+            <c:chart xmlns:r="http://schemas.openxmlformats.org/officeDocument/2006/relationships" xmlns:c="http://schemas.openxmlformats.org/drawingml/2006/chart" r:id="R6446aa3872b9475b"/>
           </a:graphicData>
         </a:graphic>
       </p:graphicFrame>
       <p:graphicFrame>
         <p:nvGraphicFramePr>
-          <p:cNvPr id="10004" name="line3d"/>
+          <p:cNvPr id="100004" name="line3d"/>
           <p:cNvGraphicFramePr/>
           <p:nvPr/>
         </p:nvGraphicFramePr>
@@ -6139,7 +6143,7 @@
         </p:xfrm>
         <a:graphic xmlns:a="http://schemas.openxmlformats.org/drawingml/2006/main">
           <a:graphicData uri="http://schemas.openxmlformats.org/drawingml/2006/chart">
-            <c:chart xmlns:r="http://schemas.openxmlformats.org/officeDocument/2006/relationships" xmlns:c="http://schemas.openxmlformats.org/drawingml/2006/chart" r:id="R5ce49d49cb7f4b40"/>
+            <c:chart xmlns:r="http://schemas.openxmlformats.org/officeDocument/2006/relationships" xmlns:c="http://schemas.openxmlformats.org/drawingml/2006/chart" r:id="R164e1d8db708483b"/>
           </a:graphicData>
         </a:graphic>
       </p:graphicFrame>
@@ -6160,8 +6164,8 @@
       <p:grpSpPr/>
       <p:sp>
         <p:nvSpPr>
-          <p:cNvPr id="10005" name="TextBox 1"/>
-          <p:cNvSpPr/>
+          <p:cNvPr id="100005" name="TextBox 1"/>
+          <p:cNvSpPr txBox="1"/>
           <p:nvPr/>
         </p:nvSpPr>
         <p:spPr>
@@ -6188,7 +6192,7 @@
       </p:sp>
       <p:graphicFrame>
         <p:nvGraphicFramePr>
-          <p:cNvPr id="10006" name="area3d"/>
+          <p:cNvPr id="100006" name="area3d"/>
           <p:cNvGraphicFramePr/>
           <p:nvPr/>
         </p:nvGraphicFramePr>
@@ -6198,13 +6202,13 @@
         </p:xfrm>
         <a:graphic xmlns:a="http://schemas.openxmlformats.org/drawingml/2006/main">
           <a:graphicData uri="http://schemas.openxmlformats.org/drawingml/2006/chart">
-            <c:chart xmlns:r="http://schemas.openxmlformats.org/officeDocument/2006/relationships" xmlns:c="http://schemas.openxmlformats.org/drawingml/2006/chart" r:id="R74b66a62b4004bbf"/>
+            <c:chart xmlns:r="http://schemas.openxmlformats.org/officeDocument/2006/relationships" xmlns:c="http://schemas.openxmlformats.org/drawingml/2006/chart" r:id="R48abe98fd70b4161"/>
           </a:graphicData>
         </a:graphic>
       </p:graphicFrame>
       <p:graphicFrame>
         <p:nvGraphicFramePr>
-          <p:cNvPr id="10007" name="stackedColumn3d"/>
+          <p:cNvPr id="100007" name="stackedColumn3d"/>
           <p:cNvGraphicFramePr/>
           <p:nvPr/>
         </p:nvGraphicFramePr>
@@ -6214,13 +6218,13 @@
         </p:xfrm>
         <a:graphic xmlns:a="http://schemas.openxmlformats.org/drawingml/2006/main">
           <a:graphicData uri="http://schemas.openxmlformats.org/drawingml/2006/chart">
-            <c:chart xmlns:r="http://schemas.openxmlformats.org/officeDocument/2006/relationships" xmlns:c="http://schemas.openxmlformats.org/drawingml/2006/chart" r:id="R2a9791b7f5764d5e"/>
+            <c:chart xmlns:r="http://schemas.openxmlformats.org/officeDocument/2006/relationships" xmlns:c="http://schemas.openxmlformats.org/drawingml/2006/chart" r:id="R949d1c427eaa49ed"/>
           </a:graphicData>
         </a:graphic>
       </p:graphicFrame>
       <p:graphicFrame>
         <p:nvGraphicFramePr>
-          <p:cNvPr id="10008" name="percentStackedColumn3d"/>
+          <p:cNvPr id="100008" name="percentStackedColumn3d"/>
           <p:cNvGraphicFramePr/>
           <p:nvPr/>
         </p:nvGraphicFramePr>
@@ -6230,13 +6234,13 @@
         </p:xfrm>
         <a:graphic xmlns:a="http://schemas.openxmlformats.org/drawingml/2006/main">
           <a:graphicData uri="http://schemas.openxmlformats.org/drawingml/2006/chart">
-            <c:chart xmlns:r="http://schemas.openxmlformats.org/officeDocument/2006/relationships" xmlns:c="http://schemas.openxmlformats.org/drawingml/2006/chart" r:id="R52d121d6ef4944c7"/>
+            <c:chart xmlns:r="http://schemas.openxmlformats.org/officeDocument/2006/relationships" xmlns:c="http://schemas.openxmlformats.org/drawingml/2006/chart" r:id="R55bbf2eee48c4dd7"/>
           </a:graphicData>
         </a:graphic>
       </p:graphicFrame>
       <p:graphicFrame>
         <p:nvGraphicFramePr>
-          <p:cNvPr id="10009" name="stackedBar3d"/>
+          <p:cNvPr id="100009" name="stackedBar3d"/>
           <p:cNvGraphicFramePr/>
           <p:nvPr/>
         </p:nvGraphicFramePr>
@@ -6246,7 +6250,7 @@
         </p:xfrm>
         <a:graphic xmlns:a="http://schemas.openxmlformats.org/drawingml/2006/main">
           <a:graphicData uri="http://schemas.openxmlformats.org/drawingml/2006/chart">
-            <c:chart xmlns:r="http://schemas.openxmlformats.org/officeDocument/2006/relationships" xmlns:c="http://schemas.openxmlformats.org/drawingml/2006/chart" r:id="R765780a40cc04e81"/>
+            <c:chart xmlns:r="http://schemas.openxmlformats.org/officeDocument/2006/relationships" xmlns:c="http://schemas.openxmlformats.org/drawingml/2006/chart" r:id="Re399a922dcb0483a"/>
           </a:graphicData>
         </a:graphic>
       </p:graphicFrame>
@@ -6267,8 +6271,8 @@
       <p:grpSpPr/>
       <p:sp>
         <p:nvSpPr>
-          <p:cNvPr id="10010" name="TextBox 1"/>
-          <p:cNvSpPr/>
+          <p:cNvPr id="100010" name="TextBox 1"/>
+          <p:cNvSpPr txBox="1"/>
           <p:nvPr/>
         </p:nvSpPr>
         <p:spPr>
@@ -6295,7 +6299,7 @@
       </p:sp>
       <p:graphicFrame>
         <p:nvGraphicFramePr>
-          <p:cNvPr id="10011" name="view3d=15,20,30"/>
+          <p:cNvPr id="100011" name="view3d=15,20,30"/>
           <p:cNvGraphicFramePr/>
           <p:nvPr/>
         </p:nvGraphicFramePr>
@@ -6305,13 +6309,13 @@
         </p:xfrm>
         <a:graphic xmlns:a="http://schemas.openxmlformats.org/drawingml/2006/main">
           <a:graphicData uri="http://schemas.openxmlformats.org/drawingml/2006/chart">
-            <c:chart xmlns:r="http://schemas.openxmlformats.org/officeDocument/2006/relationships" xmlns:c="http://schemas.openxmlformats.org/drawingml/2006/chart" r:id="Rfa5507dc240b49f2"/>
+            <c:chart xmlns:r="http://schemas.openxmlformats.org/officeDocument/2006/relationships" xmlns:c="http://schemas.openxmlformats.org/drawingml/2006/chart" r:id="Rcafc382859c44c05"/>
           </a:graphicData>
         </a:graphic>
       </p:graphicFrame>
       <p:graphicFrame>
         <p:nvGraphicFramePr>
-          <p:cNvPr id="10012" name="view3d=30,40,15"/>
+          <p:cNvPr id="100012" name="view3d=30,40,15"/>
           <p:cNvGraphicFramePr/>
           <p:nvPr/>
         </p:nvGraphicFramePr>
@@ -6321,13 +6325,13 @@
         </p:xfrm>
         <a:graphic xmlns:a="http://schemas.openxmlformats.org/drawingml/2006/main">
           <a:graphicData uri="http://schemas.openxmlformats.org/drawingml/2006/chart">
-            <c:chart xmlns:r="http://schemas.openxmlformats.org/officeDocument/2006/relationships" xmlns:c="http://schemas.openxmlformats.org/drawingml/2006/chart" r:id="R520a56cb7be64193"/>
+            <c:chart xmlns:r="http://schemas.openxmlformats.org/officeDocument/2006/relationships" xmlns:c="http://schemas.openxmlformats.org/drawingml/2006/chart" r:id="Rdf9e836988ff4b38"/>
           </a:graphicData>
         </a:graphic>
       </p:graphicFrame>
       <p:graphicFrame>
         <p:nvGraphicFramePr>
-          <p:cNvPr id="10013" name="view3d=20"/>
+          <p:cNvPr id="100013" name="view3d=20"/>
           <p:cNvGraphicFramePr/>
           <p:nvPr/>
         </p:nvGraphicFramePr>
@@ -6337,13 +6341,13 @@
         </p:xfrm>
         <a:graphic xmlns:a="http://schemas.openxmlformats.org/drawingml/2006/main">
           <a:graphicData uri="http://schemas.openxmlformats.org/drawingml/2006/chart">
-            <c:chart xmlns:r="http://schemas.openxmlformats.org/officeDocument/2006/relationships" xmlns:c="http://schemas.openxmlformats.org/drawingml/2006/chart" r:id="Ra739c6dbf46b4fea"/>
+            <c:chart xmlns:r="http://schemas.openxmlformats.org/officeDocument/2006/relationships" xmlns:c="http://schemas.openxmlformats.org/drawingml/2006/chart" r:id="R1429626d9f064887"/>
           </a:graphicData>
         </a:graphic>
       </p:graphicFrame>
       <p:graphicFrame>
         <p:nvGraphicFramePr>
-          <p:cNvPr id="10014" name="pie3d view3d=40,30,30"/>
+          <p:cNvPr id="100014" name="pie3d view3d=40,30,30"/>
           <p:cNvGraphicFramePr/>
           <p:nvPr/>
         </p:nvGraphicFramePr>
@@ -6353,7 +6357,7 @@
         </p:xfrm>
         <a:graphic xmlns:a="http://schemas.openxmlformats.org/drawingml/2006/main">
           <a:graphicData uri="http://schemas.openxmlformats.org/drawingml/2006/chart">
-            <c:chart xmlns:r="http://schemas.openxmlformats.org/officeDocument/2006/relationships" xmlns:c="http://schemas.openxmlformats.org/drawingml/2006/chart" r:id="R5fce068cef36490d"/>
+            <c:chart xmlns:r="http://schemas.openxmlformats.org/officeDocument/2006/relationships" xmlns:c="http://schemas.openxmlformats.org/drawingml/2006/chart" r:id="R8c36aee3681f4922"/>
           </a:graphicData>
         </a:graphic>
       </p:graphicFrame>
@@ -6374,8 +6378,8 @@
       <p:grpSpPr/>
       <p:sp>
         <p:nvSpPr>
-          <p:cNvPr id="10015" name="TextBox 1"/>
-          <p:cNvSpPr/>
+          <p:cNvPr id="100015" name="TextBox 1"/>
+          <p:cNvSpPr txBox="1"/>
           <p:nvPr/>
         </p:nvSpPr>
         <p:spPr>
@@ -6402,7 +6406,7 @@
       </p:sp>
       <p:graphicFrame>
         <p:nvGraphicFramePr>
-          <p:cNvPr id="10016" name="gapdepth=0"/>
+          <p:cNvPr id="100016" name="gapdepth=0"/>
           <p:cNvGraphicFramePr/>
           <p:nvPr/>
         </p:nvGraphicFramePr>
@@ -6412,13 +6416,13 @@
         </p:xfrm>
         <a:graphic xmlns:a="http://schemas.openxmlformats.org/drawingml/2006/main">
           <a:graphicData uri="http://schemas.openxmlformats.org/drawingml/2006/chart">
-            <c:chart xmlns:r="http://schemas.openxmlformats.org/officeDocument/2006/relationships" xmlns:c="http://schemas.openxmlformats.org/drawingml/2006/chart" r:id="Rdf60ed4041b246f8"/>
+            <c:chart xmlns:r="http://schemas.openxmlformats.org/officeDocument/2006/relationships" xmlns:c="http://schemas.openxmlformats.org/drawingml/2006/chart" r:id="Rd06b170c75ab47dd"/>
           </a:graphicData>
         </a:graphic>
       </p:graphicFrame>
       <p:graphicFrame>
         <p:nvGraphicFramePr>
-          <p:cNvPr id="10017" name="gapdepth=50"/>
+          <p:cNvPr id="100017" name="gapdepth=50"/>
           <p:cNvGraphicFramePr/>
           <p:nvPr/>
         </p:nvGraphicFramePr>
@@ -6428,13 +6432,13 @@
         </p:xfrm>
         <a:graphic xmlns:a="http://schemas.openxmlformats.org/drawingml/2006/main">
           <a:graphicData uri="http://schemas.openxmlformats.org/drawingml/2006/chart">
-            <c:chart xmlns:r="http://schemas.openxmlformats.org/officeDocument/2006/relationships" xmlns:c="http://schemas.openxmlformats.org/drawingml/2006/chart" r:id="R5a3c0015338940e3"/>
+            <c:chart xmlns:r="http://schemas.openxmlformats.org/officeDocument/2006/relationships" xmlns:c="http://schemas.openxmlformats.org/drawingml/2006/chart" r:id="R684db801990b4173"/>
           </a:graphicData>
         </a:graphic>
       </p:graphicFrame>
       <p:graphicFrame>
         <p:nvGraphicFramePr>
-          <p:cNvPr id="10018" name="gapdepth=150"/>
+          <p:cNvPr id="100018" name="gapdepth=150"/>
           <p:cNvGraphicFramePr/>
           <p:nvPr/>
         </p:nvGraphicFramePr>
@@ -6444,13 +6448,13 @@
         </p:xfrm>
         <a:graphic xmlns:a="http://schemas.openxmlformats.org/drawingml/2006/main">
           <a:graphicData uri="http://schemas.openxmlformats.org/drawingml/2006/chart">
-            <c:chart xmlns:r="http://schemas.openxmlformats.org/officeDocument/2006/relationships" xmlns:c="http://schemas.openxmlformats.org/drawingml/2006/chart" r:id="Rdfbe4ca8b1334925"/>
+            <c:chart xmlns:r="http://schemas.openxmlformats.org/officeDocument/2006/relationships" xmlns:c="http://schemas.openxmlformats.org/drawingml/2006/chart" r:id="R35946ca10d374690"/>
           </a:graphicData>
         </a:graphic>
       </p:graphicFrame>
       <p:graphicFrame>
         <p:nvGraphicFramePr>
-          <p:cNvPr id="10019" name="gapdepth=300"/>
+          <p:cNvPr id="100019" name="gapdepth=300"/>
           <p:cNvGraphicFramePr/>
           <p:nvPr/>
         </p:nvGraphicFramePr>
@@ -6460,7 +6464,7 @@
         </p:xfrm>
         <a:graphic xmlns:a="http://schemas.openxmlformats.org/drawingml/2006/main">
           <a:graphicData uri="http://schemas.openxmlformats.org/drawingml/2006/chart">
-            <c:chart xmlns:r="http://schemas.openxmlformats.org/officeDocument/2006/relationships" xmlns:c="http://schemas.openxmlformats.org/drawingml/2006/chart" r:id="R462527ba55db4e23"/>
+            <c:chart xmlns:r="http://schemas.openxmlformats.org/officeDocument/2006/relationships" xmlns:c="http://schemas.openxmlformats.org/drawingml/2006/chart" r:id="Rb271cbf7aec4426e"/>
           </a:graphicData>
         </a:graphic>
       </p:graphicFrame>
@@ -6481,8 +6485,8 @@
       <p:grpSpPr/>
       <p:sp>
         <p:nvSpPr>
-          <p:cNvPr id="10020" name="TextBox 1"/>
-          <p:cNvSpPr/>
+          <p:cNvPr id="100020" name="TextBox 1"/>
+          <p:cNvSpPr txBox="1"/>
           <p:nvPr/>
         </p:nvSpPr>
         <p:spPr>
@@ -6509,7 +6513,7 @@
       </p:sp>
       <p:graphicFrame>
         <p:nvGraphicFramePr>
-          <p:cNvPr id="10021" name="shape=box"/>
+          <p:cNvPr id="100021" name="shape=box"/>
           <p:cNvGraphicFramePr/>
           <p:nvPr/>
         </p:nvGraphicFramePr>
@@ -6519,13 +6523,13 @@
         </p:xfrm>
         <a:graphic xmlns:a="http://schemas.openxmlformats.org/drawingml/2006/main">
           <a:graphicData uri="http://schemas.openxmlformats.org/drawingml/2006/chart">
-            <c:chart xmlns:r="http://schemas.openxmlformats.org/officeDocument/2006/relationships" xmlns:c="http://schemas.openxmlformats.org/drawingml/2006/chart" r:id="Rc902b4dd063e4750"/>
+            <c:chart xmlns:r="http://schemas.openxmlformats.org/officeDocument/2006/relationships" xmlns:c="http://schemas.openxmlformats.org/drawingml/2006/chart" r:id="R2e8b83238f2b4be0"/>
           </a:graphicData>
         </a:graphic>
       </p:graphicFrame>
       <p:graphicFrame>
         <p:nvGraphicFramePr>
-          <p:cNvPr id="10022" name="shape=cylinder"/>
+          <p:cNvPr id="100022" name="shape=cylinder"/>
           <p:cNvGraphicFramePr/>
           <p:nvPr/>
         </p:nvGraphicFramePr>
@@ -6535,13 +6539,13 @@
         </p:xfrm>
         <a:graphic xmlns:a="http://schemas.openxmlformats.org/drawingml/2006/main">
           <a:graphicData uri="http://schemas.openxmlformats.org/drawingml/2006/chart">
-            <c:chart xmlns:r="http://schemas.openxmlformats.org/officeDocument/2006/relationships" xmlns:c="http://schemas.openxmlformats.org/drawingml/2006/chart" r:id="Ra27e4114450c4d50"/>
+            <c:chart xmlns:r="http://schemas.openxmlformats.org/officeDocument/2006/relationships" xmlns:c="http://schemas.openxmlformats.org/drawingml/2006/chart" r:id="R84c6bc97828b4009"/>
           </a:graphicData>
         </a:graphic>
       </p:graphicFrame>
       <p:graphicFrame>
         <p:nvGraphicFramePr>
-          <p:cNvPr id="10023" name="shape=cone"/>
+          <p:cNvPr id="100023" name="shape=cone"/>
           <p:cNvGraphicFramePr/>
           <p:nvPr/>
         </p:nvGraphicFramePr>
@@ -6551,13 +6555,13 @@
         </p:xfrm>
         <a:graphic xmlns:a="http://schemas.openxmlformats.org/drawingml/2006/main">
           <a:graphicData uri="http://schemas.openxmlformats.org/drawingml/2006/chart">
-            <c:chart xmlns:r="http://schemas.openxmlformats.org/officeDocument/2006/relationships" xmlns:c="http://schemas.openxmlformats.org/drawingml/2006/chart" r:id="R873d94a839234e11"/>
+            <c:chart xmlns:r="http://schemas.openxmlformats.org/officeDocument/2006/relationships" xmlns:c="http://schemas.openxmlformats.org/drawingml/2006/chart" r:id="Rbe180fd13ae344b5"/>
           </a:graphicData>
         </a:graphic>
       </p:graphicFrame>
       <p:graphicFrame>
         <p:nvGraphicFramePr>
-          <p:cNvPr id="10024" name="shape=pyramid"/>
+          <p:cNvPr id="100024" name="shape=pyramid"/>
           <p:cNvGraphicFramePr/>
           <p:nvPr/>
         </p:nvGraphicFramePr>
@@ -6567,7 +6571,7 @@
         </p:xfrm>
         <a:graphic xmlns:a="http://schemas.openxmlformats.org/drawingml/2006/main">
           <a:graphicData uri="http://schemas.openxmlformats.org/drawingml/2006/chart">
-            <c:chart xmlns:r="http://schemas.openxmlformats.org/officeDocument/2006/relationships" xmlns:c="http://schemas.openxmlformats.org/drawingml/2006/chart" r:id="Rcf6aa89bb1d649b7"/>
+            <c:chart xmlns:r="http://schemas.openxmlformats.org/officeDocument/2006/relationships" xmlns:c="http://schemas.openxmlformats.org/drawingml/2006/chart" r:id="R8dfe986046924a98"/>
           </a:graphicData>
         </a:graphic>
       </p:graphicFrame>
@@ -6588,8 +6592,8 @@
       <p:grpSpPr/>
       <p:sp>
         <p:nvSpPr>
-          <p:cNvPr id="10025" name="TextBox 1"/>
-          <p:cNvSpPr/>
+          <p:cNvPr id="100025" name="TextBox 1"/>
+          <p:cNvSpPr txBox="1"/>
           <p:nvPr/>
         </p:nvSpPr>
         <p:spPr>
@@ -6616,7 +6620,7 @@
       </p:sp>
       <p:graphicFrame>
         <p:nvGraphicFramePr>
-          <p:cNvPr id="10026" name="Styled title"/>
+          <p:cNvPr id="100026" name="Styled title"/>
           <p:cNvGraphicFramePr/>
           <p:nvPr/>
         </p:nvGraphicFramePr>
@@ -6626,13 +6630,13 @@
         </p:xfrm>
         <a:graphic xmlns:a="http://schemas.openxmlformats.org/drawingml/2006/main">
           <a:graphicData uri="http://schemas.openxmlformats.org/drawingml/2006/chart">
-            <c:chart xmlns:r="http://schemas.openxmlformats.org/officeDocument/2006/relationships" xmlns:c="http://schemas.openxmlformats.org/drawingml/2006/chart" r:id="Rf51f028511d54b1a"/>
+            <c:chart xmlns:r="http://schemas.openxmlformats.org/officeDocument/2006/relationships" xmlns:c="http://schemas.openxmlformats.org/drawingml/2006/chart" r:id="Raaab0a2115cd49df"/>
           </a:graphicData>
         </a:graphic>
       </p:graphicFrame>
       <p:graphicFrame>
         <p:nvGraphicFramePr>
-          <p:cNvPr id="10027" name="legend=top + legendFont"/>
+          <p:cNvPr id="100027" name="legend=top + legendFont"/>
           <p:cNvGraphicFramePr/>
           <p:nvPr/>
         </p:nvGraphicFramePr>
@@ -6642,13 +6646,13 @@
         </p:xfrm>
         <a:graphic xmlns:a="http://schemas.openxmlformats.org/drawingml/2006/main">
           <a:graphicData uri="http://schemas.openxmlformats.org/drawingml/2006/chart">
-            <c:chart xmlns:r="http://schemas.openxmlformats.org/officeDocument/2006/relationships" xmlns:c="http://schemas.openxmlformats.org/drawingml/2006/chart" r:id="Rb1af1232c4294b4b"/>
+            <c:chart xmlns:r="http://schemas.openxmlformats.org/officeDocument/2006/relationships" xmlns:c="http://schemas.openxmlformats.org/drawingml/2006/chart" r:id="Reee6011ccdb34390"/>
           </a:graphicData>
         </a:graphic>
       </p:graphicFrame>
       <p:graphicFrame>
         <p:nvGraphicFramePr>
-          <p:cNvPr id="10028" name="legend.overlay=true"/>
+          <p:cNvPr id="100028" name="legend.overlay=true"/>
           <p:cNvGraphicFramePr/>
           <p:nvPr/>
         </p:nvGraphicFramePr>
@@ -6658,13 +6662,13 @@
         </p:xfrm>
         <a:graphic xmlns:a="http://schemas.openxmlformats.org/drawingml/2006/main">
           <a:graphicData uri="http://schemas.openxmlformats.org/drawingml/2006/chart">
-            <c:chart xmlns:r="http://schemas.openxmlformats.org/officeDocument/2006/relationships" xmlns:c="http://schemas.openxmlformats.org/drawingml/2006/chart" r:id="Ra9879f37e24c466d"/>
+            <c:chart xmlns:r="http://schemas.openxmlformats.org/officeDocument/2006/relationships" xmlns:c="http://schemas.openxmlformats.org/drawingml/2006/chart" r:id="Rc166a2b55fa84939"/>
           </a:graphicData>
         </a:graphic>
       </p:graphicFrame>
       <p:graphicFrame>
         <p:nvGraphicFramePr>
-          <p:cNvPr id="10029" name="Chart 4"/>
+          <p:cNvPr id="100029" name="Chart 4"/>
           <p:cNvGraphicFramePr/>
           <p:nvPr/>
         </p:nvGraphicFramePr>
@@ -6674,7 +6678,7 @@
         </p:xfrm>
         <a:graphic xmlns:a="http://schemas.openxmlformats.org/drawingml/2006/main">
           <a:graphicData uri="http://schemas.openxmlformats.org/drawingml/2006/chart">
-            <c:chart xmlns:r="http://schemas.openxmlformats.org/officeDocument/2006/relationships" xmlns:c="http://schemas.openxmlformats.org/drawingml/2006/chart" r:id="R72706c395cba4c75"/>
+            <c:chart xmlns:r="http://schemas.openxmlformats.org/officeDocument/2006/relationships" xmlns:c="http://schemas.openxmlformats.org/drawingml/2006/chart" r:id="R6e37ba15625942e9"/>
           </a:graphicData>
         </a:graphic>
       </p:graphicFrame>
@@ -6695,8 +6699,8 @@
       <p:grpSpPr/>
       <p:sp>
         <p:nvSpPr>
-          <p:cNvPr id="10030" name="TextBox 1"/>
-          <p:cNvSpPr/>
+          <p:cNvPr id="100030" name="TextBox 1"/>
+          <p:cNvSpPr txBox="1"/>
           <p:nvPr/>
         </p:nvSpPr>
         <p:spPr>
@@ -6723,7 +6727,7 @@
       </p:sp>
       <p:graphicFrame>
         <p:nvGraphicFramePr>
-          <p:cNvPr id="10031" name="colors + seriesoutline"/>
+          <p:cNvPr id="100031" name="colors + seriesoutline"/>
           <p:cNvGraphicFramePr/>
           <p:nvPr/>
         </p:nvGraphicFramePr>
@@ -6733,13 +6737,13 @@
         </p:xfrm>
         <a:graphic xmlns:a="http://schemas.openxmlformats.org/drawingml/2006/main">
           <a:graphicData uri="http://schemas.openxmlformats.org/drawingml/2006/chart">
-            <c:chart xmlns:r="http://schemas.openxmlformats.org/officeDocument/2006/relationships" xmlns:c="http://schemas.openxmlformats.org/drawingml/2006/chart" r:id="R7c4dde6b8ba24a36"/>
+            <c:chart xmlns:r="http://schemas.openxmlformats.org/officeDocument/2006/relationships" xmlns:c="http://schemas.openxmlformats.org/drawingml/2006/chart" r:id="R9b3c5af8483d4272"/>
           </a:graphicData>
         </a:graphic>
       </p:graphicFrame>
       <p:graphicFrame>
         <p:nvGraphicFramePr>
-          <p:cNvPr id="10032" name="gradient + seriesshadow"/>
+          <p:cNvPr id="100032" name="gradient + seriesshadow"/>
           <p:cNvGraphicFramePr/>
           <p:nvPr/>
         </p:nvGraphicFramePr>
@@ -6749,13 +6753,13 @@
         </p:xfrm>
         <a:graphic xmlns:a="http://schemas.openxmlformats.org/drawingml/2006/main">
           <a:graphicData uri="http://schemas.openxmlformats.org/drawingml/2006/chart">
-            <c:chart xmlns:r="http://schemas.openxmlformats.org/officeDocument/2006/relationships" xmlns:c="http://schemas.openxmlformats.org/drawingml/2006/chart" r:id="Rf918f2356a52499d"/>
+            <c:chart xmlns:r="http://schemas.openxmlformats.org/officeDocument/2006/relationships" xmlns:c="http://schemas.openxmlformats.org/drawingml/2006/chart" r:id="R74fde1db0eb049ae"/>
           </a:graphicData>
         </a:graphic>
       </p:graphicFrame>
       <p:graphicFrame>
         <p:nvGraphicFramePr>
-          <p:cNvPr id="10033" name="transparency=30"/>
+          <p:cNvPr id="100033" name="transparency=30"/>
           <p:cNvGraphicFramePr/>
           <p:nvPr/>
         </p:nvGraphicFramePr>
@@ -6765,13 +6769,13 @@
         </p:xfrm>
         <a:graphic xmlns:a="http://schemas.openxmlformats.org/drawingml/2006/main">
           <a:graphicData uri="http://schemas.openxmlformats.org/drawingml/2006/chart">
-            <c:chart xmlns:r="http://schemas.openxmlformats.org/officeDocument/2006/relationships" xmlns:c="http://schemas.openxmlformats.org/drawingml/2006/chart" r:id="R26d5eb64e94443ab"/>
+            <c:chart xmlns:r="http://schemas.openxmlformats.org/officeDocument/2006/relationships" xmlns:c="http://schemas.openxmlformats.org/drawingml/2006/chart" r:id="Rda7e56b242d9400d"/>
           </a:graphicData>
         </a:graphic>
       </p:graphicFrame>
       <p:graphicFrame>
         <p:nvGraphicFramePr>
-          <p:cNvPr id="10034" name="per-series gradients"/>
+          <p:cNvPr id="100034" name="per-series gradients"/>
           <p:cNvGraphicFramePr/>
           <p:nvPr/>
         </p:nvGraphicFramePr>
@@ -6781,7 +6785,7 @@
         </p:xfrm>
         <a:graphic xmlns:a="http://schemas.openxmlformats.org/drawingml/2006/main">
           <a:graphicData uri="http://schemas.openxmlformats.org/drawingml/2006/chart">
-            <c:chart xmlns:r="http://schemas.openxmlformats.org/officeDocument/2006/relationships" xmlns:c="http://schemas.openxmlformats.org/drawingml/2006/chart" r:id="R465d1eef3a884d6e"/>
+            <c:chart xmlns:r="http://schemas.openxmlformats.org/officeDocument/2006/relationships" xmlns:c="http://schemas.openxmlformats.org/drawingml/2006/chart" r:id="Rf8184e044b644253"/>
           </a:graphicData>
         </a:graphic>
       </p:graphicFrame>
@@ -6802,8 +6806,8 @@
       <p:grpSpPr/>
       <p:sp>
         <p:nvSpPr>
-          <p:cNvPr id="10035" name="TextBox 1"/>
-          <p:cNvSpPr/>
+          <p:cNvPr id="100035" name="TextBox 1"/>
+          <p:cNvSpPr txBox="1"/>
           <p:nvPr/>
         </p:nvSpPr>
         <p:spPr>
@@ -6830,7 +6834,7 @@
       </p:sp>
       <p:graphicFrame>
         <p:nvGraphicFramePr>
-          <p:cNvPr id="10036" name="preset=minimal"/>
+          <p:cNvPr id="100036" name="preset=minimal"/>
           <p:cNvGraphicFramePr/>
           <p:nvPr/>
         </p:nvGraphicFramePr>
@@ -6840,13 +6844,13 @@
         </p:xfrm>
         <a:graphic xmlns:a="http://schemas.openxmlformats.org/drawingml/2006/main">
           <a:graphicData uri="http://schemas.openxmlformats.org/drawingml/2006/chart">
-            <c:chart xmlns:r="http://schemas.openxmlformats.org/officeDocument/2006/relationships" xmlns:c="http://schemas.openxmlformats.org/drawingml/2006/chart" r:id="R66344e7a2f1c4396"/>
+            <c:chart xmlns:r="http://schemas.openxmlformats.org/officeDocument/2006/relationships" xmlns:c="http://schemas.openxmlformats.org/drawingml/2006/chart" r:id="R7e4fc5cc5d914b41"/>
           </a:graphicData>
         </a:graphic>
       </p:graphicFrame>
       <p:graphicFrame>
         <p:nvGraphicFramePr>
-          <p:cNvPr id="10037" name="preset=dark"/>
+          <p:cNvPr id="100037" name="preset=dark"/>
           <p:cNvGraphicFramePr/>
           <p:nvPr/>
         </p:nvGraphicFramePr>
@@ -6856,13 +6860,13 @@
         </p:xfrm>
         <a:graphic xmlns:a="http://schemas.openxmlformats.org/drawingml/2006/main">
           <a:graphicData uri="http://schemas.openxmlformats.org/drawingml/2006/chart">
-            <c:chart xmlns:r="http://schemas.openxmlformats.org/officeDocument/2006/relationships" xmlns:c="http://schemas.openxmlformats.org/drawingml/2006/chart" r:id="Raca293fecf0a44e2"/>
+            <c:chart xmlns:r="http://schemas.openxmlformats.org/officeDocument/2006/relationships" xmlns:c="http://schemas.openxmlformats.org/drawingml/2006/chart" r:id="R9d0e80f897a84b7d"/>
           </a:graphicData>
         </a:graphic>
       </p:graphicFrame>
       <p:graphicFrame>
         <p:nvGraphicFramePr>
-          <p:cNvPr id="10038" name="preset=corporate"/>
+          <p:cNvPr id="100038" name="preset=corporate"/>
           <p:cNvGraphicFramePr/>
           <p:nvPr/>
         </p:nvGraphicFramePr>
@@ -6872,13 +6876,13 @@
         </p:xfrm>
         <a:graphic xmlns:a="http://schemas.openxmlformats.org/drawingml/2006/main">
           <a:graphicData uri="http://schemas.openxmlformats.org/drawingml/2006/chart">
-            <c:chart xmlns:r="http://schemas.openxmlformats.org/officeDocument/2006/relationships" xmlns:c="http://schemas.openxmlformats.org/drawingml/2006/chart" r:id="Rd5d560eb58d7489a"/>
+            <c:chart xmlns:r="http://schemas.openxmlformats.org/officeDocument/2006/relationships" xmlns:c="http://schemas.openxmlformats.org/drawingml/2006/chart" r:id="R6a39d64976c140b4"/>
           </a:graphicData>
         </a:graphic>
       </p:graphicFrame>
       <p:graphicFrame>
         <p:nvGraphicFramePr>
-          <p:cNvPr id="10039" name="preset=colorful"/>
+          <p:cNvPr id="100039" name="preset=colorful"/>
           <p:cNvGraphicFramePr/>
           <p:nvPr/>
         </p:nvGraphicFramePr>
@@ -6888,7 +6892,7 @@
         </p:xfrm>
         <a:graphic xmlns:a="http://schemas.openxmlformats.org/drawingml/2006/main">
           <a:graphicData uri="http://schemas.openxmlformats.org/drawingml/2006/chart">
-            <c:chart xmlns:r="http://schemas.openxmlformats.org/officeDocument/2006/relationships" xmlns:c="http://schemas.openxmlformats.org/drawingml/2006/chart" r:id="R45188bfc220c4ed9"/>
+            <c:chart xmlns:r="http://schemas.openxmlformats.org/officeDocument/2006/relationships" xmlns:c="http://schemas.openxmlformats.org/drawingml/2006/chart" r:id="Rbad7770de9c54a60"/>
           </a:graphicData>
         </a:graphic>
       </p:graphicFrame>
